--- a/curso_es/pptx/S03.pptx
+++ b/curso_es/pptx/S03.pptx
@@ -3904,7 +3904,7 @@
                 </a:solidFill>
                 <a:latin typeface="Nunito Sans"/>
               </a:rPr>
-              <a:t>Omar está segurísimo: «Las llaves están en la mochila». No están. Al final aparecen en la mesa de la cocina.</a:t>
+              <a:t>Un chico está segurísimo: «Las llaves están en la mochila». No están. Al final aparecen en la mesa de la cocina.</a:t>
             </a:r>
           </a:p>
         </p:txBody>
@@ -4213,7 +4213,7 @@
                 </a:solidFill>
                 <a:latin typeface="Nunito Sans"/>
               </a:rPr>
-              <a:t>Aitor no ha estudiado. En una pregunta de test elige la b) al azar… y acierta.</a:t>
+              <a:t>Un chico no ha estudiado. En una pregunta de test elige la b) al azar… y acierta.</a:t>
             </a:r>
           </a:p>
         </p:txBody>
@@ -4522,7 +4522,7 @@
                 </a:solidFill>
                 <a:latin typeface="Nunito Sans"/>
               </a:rPr>
-              <a:t>Naiara dice: «El agua hierve a 100 grados a nivel del mar». Lo explicaron en clase y ella lo midió en el laboratorio.</a:t>
+              <a:t>Una chica dice: «El agua hierve a 100 grados a nivel del mar». Lo explicaron en clase y ella lo midió en el laboratorio.</a:t>
             </a:r>
           </a:p>
         </p:txBody>
@@ -4620,7 +4620,7 @@
                 </a:solidFill>
                 <a:latin typeface="Nunito Sans"/>
               </a:rPr>
-              <a:t>Conclusión: Naiara lo sabe. Es verdad y tiene buenas razones.</a:t>
+              <a:t>Conclusión: esa chica lo sabe. Es verdad y tiene buenas razones.</a:t>
             </a:r>
           </a:p>
         </p:txBody>
@@ -4806,7 +4806,7 @@
                 </a:solidFill>
                 <a:latin typeface="Nunito Sans"/>
               </a:rPr>
-              <a:t>Leire mira el reloj del pasillo: marca las 10:15. Son las 10:15. Pero el reloj está parado desde ayer a las 10:15.</a:t>
+              <a:t>Una chica mira el reloj del pasillo: marca las 10:15. Son las 10:15. Pero el reloj está parado desde ayer a las 10:15.</a:t>
             </a:r>
           </a:p>
         </p:txBody>
@@ -4854,7 +4854,7 @@
                 </a:solidFill>
                 <a:latin typeface="Nunito Sans"/>
               </a:rPr>
-              <a:t>¿Sabe Leire qué hora es?</a:t>
+              <a:t>¿Sabe esa chica qué hora es?</a:t>
             </a:r>
           </a:p>
           <a:p>
@@ -6532,7 +6532,7 @@
                 </a:solidFill>
                 <a:latin typeface="Nunito Sans"/>
               </a:rPr>
-              <a:t>Omar está segurísimo de que dejó las llaves en la mochila. Las busca… y no están.</a:t>
+              <a:t>Un chico está segurísimo de que dejó las llaves en la mochila. Las busca… y no están.</a:t>
             </a:r>
           </a:p>
         </p:txBody>
@@ -6571,7 +6571,7 @@
                 </a:solidFill>
                 <a:latin typeface="Nunito Sans"/>
               </a:rPr>
-              <a:t>¿Omar sabía dónde estaban las llaves, o solo lo creía?</a:t>
+              <a:t>¿Ese chico sabía dónde estaban las llaves, o solo lo creía?</a:t>
             </a:r>
           </a:p>
         </p:txBody>
